--- a/decks/englit-romeo/englit-romeo_ch5_banishment-and-the-plan.pptx
+++ b/decks/englit-romeo/englit-romeo_ch5_banishment-and-the-plan.pptx
@@ -125,37 +125,37 @@
   <p:extLst>
     <p:ext uri="{521415D9-36F7-43E2-AB2F-B90AF26B5E84}">
       <p14:sectionLst xmlns:p14="http://schemas.microsoft.com/office/powerpoint/2010/main">
-        <p14:section name="Opening" id="{5e92185b-bead-3e0c-ddae-91c72da45aad}">
+        <p14:section name="Opening" id="{d2c9a9ed-b38b-c45f-79ca-574d4a56553e}">
           <p14:sldIdLst>
             <p14:sldId id="256"/>
           </p14:sldIdLst>
         </p14:section>
-        <p14:section name="Gate" id="{db7389a6-4543-f419-f59f-ec2ce898a72e}">
+        <p14:section name="Gate" id="{e78cc4ad-78cf-6b14-ca6f-6010f0c5bdff}">
           <p14:sldIdLst>
             <p14:sldId id="257"/>
             <p14:sldId id="258"/>
           </p14:sldIdLst>
         </p14:section>
-        <p14:section name="Pre-teach" id="{e4f89043-e73a-34a0-212f-29b71a365cd6}">
+        <p14:section name="Pre-teach" id="{ef725ef2-465d-c3b1-d457-d9100afa9ca0}">
           <p14:sldIdLst>
             <p14:sldId id="259"/>
             <p14:sldId id="260"/>
           </p14:sldIdLst>
         </p14:section>
-        <p14:section name="Read-along" id="{4698f6f6-c867-63a6-1f22-bdc3f2f2467f}">
+        <p14:section name="Read-along" id="{8446c290-e764-23e6-2a77-c054cf595098}">
           <p14:sldIdLst>
             <p14:sldId id="261"/>
             <p14:sldId id="262"/>
           </p14:sldIdLst>
         </p14:section>
-        <p14:section name="Teach" id="{428a15c2-1f6f-818d-36d7-5395af0427b2}">
+        <p14:section name="Teach" id="{d9b65ddd-c9cb-44a6-e61b-38d83fa26bf6}">
           <p14:sldIdLst>
             <p14:sldId id="263"/>
             <p14:sldId id="264"/>
             <p14:sldId id="265"/>
           </p14:sldIdLst>
         </p14:section>
-        <p14:section name="Routes" id="{e746f771-7a3d-bba5-7127-10361f41e2f5}">
+        <p14:section name="Routes" id="{fea2f74d-e58e-bb6a-9f1b-049473221f74}">
           <p14:sldIdLst>
             <p14:sldId id="266"/>
             <p14:sldId id="267"/>
@@ -163,12 +163,12 @@
             <p14:sldId id="269"/>
           </p14:sldIdLst>
         </p14:section>
-        <p14:section name="Close" id="{7866fef0-5032-8867-e7f8-6b2330fb51dc}">
+        <p14:section name="Close" id="{a7f5b9b4-6227-394d-0204-444e96b73c84}">
           <p14:sldIdLst>
             <p14:sldId id="270"/>
           </p14:sldIdLst>
         </p14:section>
-        <p14:section name="Answers" id="{c293fd48-8fe8-b265-578c-1446ced5081c}">
+        <p14:section name="Answers" id="{07a9b99e-fffb-c1c7-4abe-9a396b37556e}">
           <p14:sldIdLst>
             <p14:sldId id="271"/>
             <p14:sldId id="272"/>
@@ -1141,7 +1141,7 @@
               <a:rPr lang="en-US" dirty="0"/>
               <a:t>Exit ticket — individual, silent, on a slip or mini-whiteboard. Recall before help: no notes, no lanes, no hints. Collect before pupils leave.
 Question: In Act 4 Scene 2 Juliet tells her father she has met Paris at the Friar's cell and will marry him. Why is this moment dramatic irony?
-Answer: B   Because the audience knows she is already married and is following the Friar's plan, but Capulet does not. Juliet's apology is a performance, and the audience watches her father reward a lie. The gap between what we know and what he knows makes her kneeling painful rather than comforting, and his happy decision to bring the wedding forward shortens the time the plan has to work.
+Answer: D   Because the audience knows she is already married and is following the Friar's plan, but Capulet does not. Juliet's apology is a performance, and the audience watches her father reward a lie. The gap between what we know and what he knows makes her kneeling painful rather than comforting, and his happy decision to bring the wedding forward shortens the time the plan has to work.
 Source of this question: module 3 task ("Dramatic irony in Act 4 Scene 2") from the manifest.
 Sort the slips: correct → ready to move on; incorrect → start next lesson in the pre-teach group, with the read-along and the Support lane. Same destination next time.</a:t>
             </a:r>
@@ -1509,7 +1509,7 @@
             <a:r>
               <a:rPr lang="en-US" dirty="0"/>
               <a:t>Answers — exit ticket: Exit ticket. Reveal the answer; pupils mark their own work in a different colour, then read the "why" together. Same destination for every lane, so one answer serves the whole class.
-Answer: B   Because the audience knows she is already married and is following the Friar's plan, but Capulet does not
+Answer: D   Because the audience knows she is already married and is following the Friar's plan, but Capulet does not
 Why: Juliet's apology is a performance, and the audience watches her father reward a lie. The gap between what we know and what he knows makes her kneeling painful rather than comforting, and his happy decision to bring the wedding forward shortens the time the plan has to work.
 Ask a Support pupil to explain one step, and a Stretch pupil to share their extension.</a:t>
             </a:r>
@@ -1602,7 +1602,7 @@
               <a:t>Do now — retrieval. Silent, no notes, no help: recall comes before any support. Give about four minutes.
 1. Juliet calls Romeo a ‘beautiful tyrant’. Two opposite words placed together like this make an ___.  →  oxymoron
 2. For how many hours does Friar Lawrence say Juliet will seem dead after drinking the potion?  →  42 hours
-3. Why would marrying Paris be a sin for Juliet?  →  B   Because she is already married to Romeo, so it would be bigamy
+3. Why would marrying Paris be a sin for Juliet?  →  C   Because she is already married to Romeo, so it would be bigamy
 Circulate: who gets 3/3 (Stretch route), 2/3 (Core), 0–1 (Support)? Use this to route pupils later in the lesson.</a:t>
             </a:r>
             <a:endParaRPr lang="en-US" dirty="0"/>
@@ -1694,7 +1694,7 @@
               <a:t>Answers — pupils mark their own in a different colour, then hands up for 3/3, 2/3, 1/3.
 1. oxymoron. An oxymoron is a two-word contradiction. Here it shows Juliet's conflicting feelings about the man she loves who has killed her cousin.
 2. 42 hours. The Friar says she will continue two and forty hours, which is 42. The timing is what the letter to Romeo depends on.
-3. B   Because she is already married to Romeo, so it would be bigamy. Juliet is secretly married. Bigamy, marrying while already married, was a sin in the eyes of the church and a crime in law.
+3. C   Because she is already married to Romeo, so it would be bigamy. Juliet is secretly married. Bigamy, marrying while already married, was a sin in the eyes of the church and a crime in law.
 Say the route each score points to: 3/3 Stretch, 2/3 Core, 0–1 Support. Pupils may choose to move up.</a:t>
             </a:r>
             <a:endParaRPr lang="en-US" dirty="0"/>
@@ -8575,7 +8575,7 @@
                 <a:ea typeface="Calibri" pitchFamily="34" charset="-122"/>
                 <a:cs typeface="Calibri" pitchFamily="34" charset="-120"/>
               </a:rPr>
-              <a:t>Because Juliet really has changed her mind about Paris</a:t>
+              <a:t>Because Paris has told Capulet about Romeo</a:t>
             </a:r>
             <a:endParaRPr lang="en-US" sz="2200" dirty="0"/>
           </a:p>
@@ -8612,7 +8612,7 @@
                 <a:ea typeface="Calibri" pitchFamily="34" charset="-122"/>
                 <a:cs typeface="Calibri" pitchFamily="34" charset="-120"/>
               </a:rPr>
-              <a:t>Because the audience knows she is already married and is following the Friar's plan, but Capulet does not</a:t>
+              <a:t>Because Juliet really has changed her mind about Paris</a:t>
             </a:r>
             <a:endParaRPr lang="en-US" sz="2200" dirty="0"/>
           </a:p>
@@ -8686,7 +8686,7 @@
                 <a:ea typeface="Calibri" pitchFamily="34" charset="-122"/>
                 <a:cs typeface="Calibri" pitchFamily="34" charset="-120"/>
               </a:rPr>
-              <a:t>Because Paris has told Capulet about Romeo</a:t>
+              <a:t>Because the audience knows she is already married and is following the Friar's plan, but Capulet does not</a:t>
             </a:r>
             <a:endParaRPr lang="en-US" sz="2200" dirty="0"/>
           </a:p>
@@ -10659,7 +10659,7 @@
                 <a:ea typeface="Cambria" pitchFamily="34" charset="-122"/>
                 <a:cs typeface="Cambria" pitchFamily="34" charset="-120"/>
               </a:rPr>
-              <a:t>B   Because the audience knows she is already married and is following the Friar's plan, but Capulet does not</a:t>
+              <a:t>D   Because the audience knows she is already married and is following the Friar's plan, but Capulet does not</a:t>
             </a:r>
             <a:endParaRPr lang="en-US" sz="1800" dirty="0"/>
           </a:p>
@@ -11589,7 +11589,7 @@
                 <a:ea typeface="Calibri" pitchFamily="34" charset="-122"/>
                 <a:cs typeface="Calibri" pitchFamily="34" charset="-120"/>
               </a:rPr>
-              <a:t>Because Paris is a Montague</a:t>
+              <a:t>Because her father has not consented</a:t>
             </a:r>
             <a:endParaRPr lang="en-US" sz="1800" dirty="0"/>
           </a:p>
@@ -11626,7 +11626,7 @@
                 <a:ea typeface="Calibri" pitchFamily="34" charset="-122"/>
                 <a:cs typeface="Calibri" pitchFamily="34" charset="-120"/>
               </a:rPr>
-              <a:t>Because she is already married to Romeo, so it would be bigamy</a:t>
+              <a:t>Because Paris is a Montague</a:t>
             </a:r>
             <a:endParaRPr lang="en-US" sz="1800" dirty="0"/>
           </a:p>
@@ -11663,7 +11663,7 @@
                 <a:ea typeface="Calibri" pitchFamily="34" charset="-122"/>
                 <a:cs typeface="Calibri" pitchFamily="34" charset="-120"/>
               </a:rPr>
-              <a:t>Because her father has not consented</a:t>
+              <a:t>Because she is already married to Romeo, so it would be bigamy</a:t>
             </a:r>
             <a:endParaRPr lang="en-US" sz="1800" dirty="0"/>
           </a:p>
@@ -12601,7 +12601,7 @@
                 <a:ea typeface="Calibri" pitchFamily="34" charset="-122"/>
                 <a:cs typeface="Calibri" pitchFamily="34" charset="-120"/>
               </a:rPr>
-              <a:t>B   Because she is already married to Romeo, so it would be bigamy</a:t>
+              <a:t>C   Because she is already married to Romeo, so it would be bigamy</a:t>
             </a:r>
             <a:endParaRPr lang="en-US" sz="2200" dirty="0"/>
           </a:p>

--- a/decks/englit-romeo/englit-romeo_ch5_banishment-and-the-plan.pptx
+++ b/decks/englit-romeo/englit-romeo_ch5_banishment-and-the-plan.pptx
@@ -125,37 +125,37 @@
   <p:extLst>
     <p:ext uri="{521415D9-36F7-43E2-AB2F-B90AF26B5E84}">
       <p14:sectionLst xmlns:p14="http://schemas.microsoft.com/office/powerpoint/2010/main">
-        <p14:section name="Opening" id="{d2c9a9ed-b38b-c45f-79ca-574d4a56553e}">
+        <p14:section name="Opening" id="{77560f78-da48-0fd1-6721-6b1330571103}">
           <p14:sldIdLst>
             <p14:sldId id="256"/>
           </p14:sldIdLst>
         </p14:section>
-        <p14:section name="Gate" id="{e78cc4ad-78cf-6b14-ca6f-6010f0c5bdff}">
+        <p14:section name="Gate" id="{08054519-acbd-84cd-bb58-d9087fabce7c}">
           <p14:sldIdLst>
             <p14:sldId id="257"/>
             <p14:sldId id="258"/>
           </p14:sldIdLst>
         </p14:section>
-        <p14:section name="Pre-teach" id="{ef725ef2-465d-c3b1-d457-d9100afa9ca0}">
+        <p14:section name="Pre-teach" id="{7fd8ff70-15ec-4471-70b8-e970b976596b}">
           <p14:sldIdLst>
             <p14:sldId id="259"/>
             <p14:sldId id="260"/>
           </p14:sldIdLst>
         </p14:section>
-        <p14:section name="Read-along" id="{8446c290-e764-23e6-2a77-c054cf595098}">
+        <p14:section name="Read-along" id="{da459894-b445-4a81-664c-1146a9258882}">
           <p14:sldIdLst>
             <p14:sldId id="261"/>
             <p14:sldId id="262"/>
           </p14:sldIdLst>
         </p14:section>
-        <p14:section name="Teach" id="{d9b65ddd-c9cb-44a6-e61b-38d83fa26bf6}">
+        <p14:section name="Teach" id="{2573c68d-747f-bcdf-1b5d-f582d171c3f4}">
           <p14:sldIdLst>
             <p14:sldId id="263"/>
             <p14:sldId id="264"/>
             <p14:sldId id="265"/>
           </p14:sldIdLst>
         </p14:section>
-        <p14:section name="Routes" id="{fea2f74d-e58e-bb6a-9f1b-049473221f74}">
+        <p14:section name="Routes" id="{f6a420c5-1d01-4c79-ad75-5d616afbda28}">
           <p14:sldIdLst>
             <p14:sldId id="266"/>
             <p14:sldId id="267"/>
@@ -163,12 +163,12 @@
             <p14:sldId id="269"/>
           </p14:sldIdLst>
         </p14:section>
-        <p14:section name="Close" id="{a7f5b9b4-6227-394d-0204-444e96b73c84}">
+        <p14:section name="Close" id="{d5ba1c2d-8f89-87c1-42bf-0c34cbb0e86f}">
           <p14:sldIdLst>
             <p14:sldId id="270"/>
           </p14:sldIdLst>
         </p14:section>
-        <p14:section name="Answers" id="{07a9b99e-fffb-c1c7-4abe-9a396b37556e}">
+        <p14:section name="Answers" id="{7617139b-04b2-2299-5f7b-867c8374f651}">
           <p14:sldIdLst>
             <p14:sldId id="271"/>
             <p14:sldId id="272"/>
